--- a/Supp Data/Fig 6.pptx
+++ b/Supp Data/Fig 6.pptx
@@ -2,7 +2,7 @@
 <file path=ppt/presentation.xml><?xml version="1.0" encoding="utf-8"?>
 <p:presentation xmlns:a="http://schemas.openxmlformats.org/drawingml/2006/main" xmlns:r="http://schemas.openxmlformats.org/officeDocument/2006/relationships" xmlns:p="http://schemas.openxmlformats.org/presentationml/2006/main" saveSubsetFonts="1" autoCompressPictures="0">
   <p:sldMasterIdLst>
-    <p:sldMasterId id="2147484032" r:id="rId1"/>
+    <p:sldMasterId id="2147483948" r:id="rId1"/>
   </p:sldMasterIdLst>
   <p:notesMasterIdLst>
     <p:notesMasterId r:id="rId3"/>
@@ -10,7 +10,7 @@
   <p:sldIdLst>
     <p:sldId id="282" r:id="rId2"/>
   </p:sldIdLst>
-  <p:sldSz cx="1474788" cy="917575"/>
+  <p:sldSz cx="1763713" cy="914400"/>
   <p:notesSz cx="6858000" cy="9144000"/>
   <p:defaultTextStyle>
     <a:defPPr>
@@ -197,7 +197,7 @@
           <a:p>
             <a:fld id="{810CFC23-F338-EB41-8653-4316F1EF48B5}" type="datetimeFigureOut">
               <a:rPr lang="en-DE" smtClean="0"/>
-              <a:t>13.05.26</a:t>
+              <a:t>19.05.26</a:t>
             </a:fld>
             <a:endParaRPr lang="en-DE"/>
           </a:p>
@@ -215,8 +215,8 @@
         </p:nvSpPr>
         <p:spPr>
           <a:xfrm>
-            <a:off x="949325" y="1143000"/>
-            <a:ext cx="4959350" cy="3086100"/>
+            <a:off x="454025" y="1143000"/>
+            <a:ext cx="5949950" cy="3086100"/>
           </a:xfrm>
           <a:prstGeom prst="rect">
             <a:avLst/>
@@ -371,8 +371,8 @@
   </p:cSld>
   <p:clrMap bg1="lt1" tx1="dk1" bg2="lt2" tx2="dk2" accent1="accent1" accent2="accent2" accent3="accent3" accent4="accent4" accent5="accent5" accent6="accent6" hlink="hlink" folHlink="folHlink"/>
   <p:notesStyle>
-    <a:lvl1pPr marL="0" algn="l" defTabSz="200581" rtl="0" eaLnBrk="1" latinLnBrk="0" hangingPunct="1">
-      <a:defRPr sz="263" kern="1200">
+    <a:lvl1pPr marL="0" algn="l" defTabSz="141687" rtl="0" eaLnBrk="1" latinLnBrk="0" hangingPunct="1">
+      <a:defRPr sz="186" kern="1200">
         <a:solidFill>
           <a:schemeClr val="tx1"/>
         </a:solidFill>
@@ -381,8 +381,8 @@
         <a:cs typeface="+mn-cs"/>
       </a:defRPr>
     </a:lvl1pPr>
-    <a:lvl2pPr marL="100289" algn="l" defTabSz="200581" rtl="0" eaLnBrk="1" latinLnBrk="0" hangingPunct="1">
-      <a:defRPr sz="263" kern="1200">
+    <a:lvl2pPr marL="70843" algn="l" defTabSz="141687" rtl="0" eaLnBrk="1" latinLnBrk="0" hangingPunct="1">
+      <a:defRPr sz="186" kern="1200">
         <a:solidFill>
           <a:schemeClr val="tx1"/>
         </a:solidFill>
@@ -391,8 +391,8 @@
         <a:cs typeface="+mn-cs"/>
       </a:defRPr>
     </a:lvl2pPr>
-    <a:lvl3pPr marL="200581" algn="l" defTabSz="200581" rtl="0" eaLnBrk="1" latinLnBrk="0" hangingPunct="1">
-      <a:defRPr sz="263" kern="1200">
+    <a:lvl3pPr marL="141687" algn="l" defTabSz="141687" rtl="0" eaLnBrk="1" latinLnBrk="0" hangingPunct="1">
+      <a:defRPr sz="186" kern="1200">
         <a:solidFill>
           <a:schemeClr val="tx1"/>
         </a:solidFill>
@@ -401,8 +401,8 @@
         <a:cs typeface="+mn-cs"/>
       </a:defRPr>
     </a:lvl3pPr>
-    <a:lvl4pPr marL="300869" algn="l" defTabSz="200581" rtl="0" eaLnBrk="1" latinLnBrk="0" hangingPunct="1">
-      <a:defRPr sz="263" kern="1200">
+    <a:lvl4pPr marL="212530" algn="l" defTabSz="141687" rtl="0" eaLnBrk="1" latinLnBrk="0" hangingPunct="1">
+      <a:defRPr sz="186" kern="1200">
         <a:solidFill>
           <a:schemeClr val="tx1"/>
         </a:solidFill>
@@ -411,8 +411,8 @@
         <a:cs typeface="+mn-cs"/>
       </a:defRPr>
     </a:lvl4pPr>
-    <a:lvl5pPr marL="401159" algn="l" defTabSz="200581" rtl="0" eaLnBrk="1" latinLnBrk="0" hangingPunct="1">
-      <a:defRPr sz="263" kern="1200">
+    <a:lvl5pPr marL="283373" algn="l" defTabSz="141687" rtl="0" eaLnBrk="1" latinLnBrk="0" hangingPunct="1">
+      <a:defRPr sz="186" kern="1200">
         <a:solidFill>
           <a:schemeClr val="tx1"/>
         </a:solidFill>
@@ -421,8 +421,8 @@
         <a:cs typeface="+mn-cs"/>
       </a:defRPr>
     </a:lvl5pPr>
-    <a:lvl6pPr marL="501449" algn="l" defTabSz="200581" rtl="0" eaLnBrk="1" latinLnBrk="0" hangingPunct="1">
-      <a:defRPr sz="263" kern="1200">
+    <a:lvl6pPr marL="354217" algn="l" defTabSz="141687" rtl="0" eaLnBrk="1" latinLnBrk="0" hangingPunct="1">
+      <a:defRPr sz="186" kern="1200">
         <a:solidFill>
           <a:schemeClr val="tx1"/>
         </a:solidFill>
@@ -431,8 +431,8 @@
         <a:cs typeface="+mn-cs"/>
       </a:defRPr>
     </a:lvl6pPr>
-    <a:lvl7pPr marL="601740" algn="l" defTabSz="200581" rtl="0" eaLnBrk="1" latinLnBrk="0" hangingPunct="1">
-      <a:defRPr sz="263" kern="1200">
+    <a:lvl7pPr marL="425060" algn="l" defTabSz="141687" rtl="0" eaLnBrk="1" latinLnBrk="0" hangingPunct="1">
+      <a:defRPr sz="186" kern="1200">
         <a:solidFill>
           <a:schemeClr val="tx1"/>
         </a:solidFill>
@@ -441,8 +441,8 @@
         <a:cs typeface="+mn-cs"/>
       </a:defRPr>
     </a:lvl7pPr>
-    <a:lvl8pPr marL="702030" algn="l" defTabSz="200581" rtl="0" eaLnBrk="1" latinLnBrk="0" hangingPunct="1">
-      <a:defRPr sz="263" kern="1200">
+    <a:lvl8pPr marL="495904" algn="l" defTabSz="141687" rtl="0" eaLnBrk="1" latinLnBrk="0" hangingPunct="1">
+      <a:defRPr sz="186" kern="1200">
         <a:solidFill>
           <a:schemeClr val="tx1"/>
         </a:solidFill>
@@ -451,8 +451,8 @@
         <a:cs typeface="+mn-cs"/>
       </a:defRPr>
     </a:lvl8pPr>
-    <a:lvl9pPr marL="802318" algn="l" defTabSz="200581" rtl="0" eaLnBrk="1" latinLnBrk="0" hangingPunct="1">
-      <a:defRPr sz="263" kern="1200">
+    <a:lvl9pPr marL="566747" algn="l" defTabSz="141687" rtl="0" eaLnBrk="1" latinLnBrk="0" hangingPunct="1">
+      <a:defRPr sz="186" kern="1200">
         <a:solidFill>
           <a:schemeClr val="tx1"/>
         </a:solidFill>
@@ -463,95 +463,6 @@
     </a:lvl9pPr>
   </p:notesStyle>
 </p:notesMaster>
-</file>
-
-<file path=ppt/notesSlides/notesSlide1.xml><?xml version="1.0" encoding="utf-8"?>
-<p:notes xmlns:a="http://schemas.openxmlformats.org/drawingml/2006/main" xmlns:r="http://schemas.openxmlformats.org/officeDocument/2006/relationships" xmlns:p="http://schemas.openxmlformats.org/presentationml/2006/main">
-  <p:cSld>
-    <p:spTree>
-      <p:nvGrpSpPr>
-        <p:cNvPr id="1" name=""/>
-        <p:cNvGrpSpPr/>
-        <p:nvPr/>
-      </p:nvGrpSpPr>
-      <p:grpSpPr>
-        <a:xfrm>
-          <a:off x="0" y="0"/>
-          <a:ext cx="0" cy="0"/>
-          <a:chOff x="0" y="0"/>
-          <a:chExt cx="0" cy="0"/>
-        </a:xfrm>
-      </p:grpSpPr>
-      <p:sp>
-        <p:nvSpPr>
-          <p:cNvPr id="2" name="Slide Image Placeholder 1"/>
-          <p:cNvSpPr>
-            <a:spLocks noGrp="1" noRot="1" noChangeAspect="1"/>
-          </p:cNvSpPr>
-          <p:nvPr>
-            <p:ph type="sldImg"/>
-          </p:nvPr>
-        </p:nvSpPr>
-        <p:spPr>
-          <a:xfrm>
-            <a:off x="949325" y="1143000"/>
-            <a:ext cx="4959350" cy="3086100"/>
-          </a:xfrm>
-        </p:spPr>
-      </p:sp>
-      <p:sp>
-        <p:nvSpPr>
-          <p:cNvPr id="3" name="Notes Placeholder 2"/>
-          <p:cNvSpPr>
-            <a:spLocks noGrp="1"/>
-          </p:cNvSpPr>
-          <p:nvPr>
-            <p:ph type="body" idx="1"/>
-          </p:nvPr>
-        </p:nvSpPr>
-        <p:spPr/>
-        <p:txBody>
-          <a:bodyPr/>
-          <a:lstStyle/>
-          <a:p>
-            <a:endParaRPr lang="en-DE" dirty="0"/>
-          </a:p>
-        </p:txBody>
-      </p:sp>
-      <p:sp>
-        <p:nvSpPr>
-          <p:cNvPr id="4" name="Slide Number Placeholder 3"/>
-          <p:cNvSpPr>
-            <a:spLocks noGrp="1"/>
-          </p:cNvSpPr>
-          <p:nvPr>
-            <p:ph type="sldNum" sz="quarter" idx="5"/>
-          </p:nvPr>
-        </p:nvSpPr>
-        <p:spPr/>
-        <p:txBody>
-          <a:bodyPr/>
-          <a:lstStyle/>
-          <a:p>
-            <a:fld id="{9047636C-B006-8E47-A161-B8C06667EDC6}" type="slidenum">
-              <a:rPr lang="en-DE" smtClean="0"/>
-              <a:t>1</a:t>
-            </a:fld>
-            <a:endParaRPr lang="en-DE"/>
-          </a:p>
-        </p:txBody>
-      </p:sp>
-    </p:spTree>
-    <p:extLst>
-      <p:ext uri="{BB962C8B-B14F-4D97-AF65-F5344CB8AC3E}">
-        <p14:creationId xmlns:p14="http://schemas.microsoft.com/office/powerpoint/2010/main" val="3460546954"/>
-      </p:ext>
-    </p:extLst>
-  </p:cSld>
-  <p:clrMapOvr>
-    <a:masterClrMapping/>
-  </p:clrMapOvr>
-</p:notes>
 </file>
 
 <file path=ppt/slideLayouts/slideLayout1.xml><?xml version="1.0" encoding="utf-8"?>
@@ -583,15 +494,15 @@
         </p:nvSpPr>
         <p:spPr>
           <a:xfrm>
-            <a:off x="184349" y="150168"/>
-            <a:ext cx="1106091" cy="319452"/>
+            <a:off x="220464" y="149648"/>
+            <a:ext cx="1322785" cy="318347"/>
           </a:xfrm>
         </p:spPr>
         <p:txBody>
           <a:bodyPr anchor="b"/>
           <a:lstStyle>
             <a:lvl1pPr algn="ctr">
-              <a:defRPr sz="726"/>
+              <a:defRPr sz="800"/>
             </a:lvl1pPr>
           </a:lstStyle>
           <a:p>
@@ -615,8 +526,8 @@
         </p:nvSpPr>
         <p:spPr>
           <a:xfrm>
-            <a:off x="184349" y="481939"/>
-            <a:ext cx="1106091" cy="221535"/>
+            <a:off x="220464" y="480272"/>
+            <a:ext cx="1322785" cy="220768"/>
           </a:xfrm>
         </p:spPr>
         <p:txBody>
@@ -624,39 +535,39 @@
           <a:lstStyle>
             <a:lvl1pPr marL="0" indent="0" algn="ctr">
               <a:buNone/>
-              <a:defRPr sz="290"/>
+              <a:defRPr sz="320"/>
             </a:lvl1pPr>
-            <a:lvl2pPr marL="55321" indent="0" algn="ctr">
-              <a:buNone/>
-              <a:defRPr sz="242"/>
+            <a:lvl2pPr marL="60945" indent="0" algn="ctr">
+              <a:buNone/>
+              <a:defRPr sz="267"/>
             </a:lvl2pPr>
-            <a:lvl3pPr marL="110642" indent="0" algn="ctr">
-              <a:buNone/>
-              <a:defRPr sz="218"/>
+            <a:lvl3pPr marL="121890" indent="0" algn="ctr">
+              <a:buNone/>
+              <a:defRPr sz="240"/>
             </a:lvl3pPr>
-            <a:lvl4pPr marL="165964" indent="0" algn="ctr">
-              <a:buNone/>
-              <a:defRPr sz="194"/>
+            <a:lvl4pPr marL="182834" indent="0" algn="ctr">
+              <a:buNone/>
+              <a:defRPr sz="213"/>
             </a:lvl4pPr>
-            <a:lvl5pPr marL="221285" indent="0" algn="ctr">
-              <a:buNone/>
-              <a:defRPr sz="194"/>
+            <a:lvl5pPr marL="243779" indent="0" algn="ctr">
+              <a:buNone/>
+              <a:defRPr sz="213"/>
             </a:lvl5pPr>
-            <a:lvl6pPr marL="276606" indent="0" algn="ctr">
-              <a:buNone/>
-              <a:defRPr sz="194"/>
+            <a:lvl6pPr marL="304724" indent="0" algn="ctr">
+              <a:buNone/>
+              <a:defRPr sz="213"/>
             </a:lvl6pPr>
-            <a:lvl7pPr marL="331927" indent="0" algn="ctr">
-              <a:buNone/>
-              <a:defRPr sz="194"/>
+            <a:lvl7pPr marL="365669" indent="0" algn="ctr">
+              <a:buNone/>
+              <a:defRPr sz="213"/>
             </a:lvl7pPr>
-            <a:lvl8pPr marL="387248" indent="0" algn="ctr">
-              <a:buNone/>
-              <a:defRPr sz="194"/>
+            <a:lvl8pPr marL="426613" indent="0" algn="ctr">
+              <a:buNone/>
+              <a:defRPr sz="213"/>
             </a:lvl8pPr>
-            <a:lvl9pPr marL="442570" indent="0" algn="ctr">
-              <a:buNone/>
-              <a:defRPr sz="194"/>
+            <a:lvl9pPr marL="487558" indent="0" algn="ctr">
+              <a:buNone/>
+              <a:defRPr sz="213"/>
             </a:lvl9pPr>
           </a:lstStyle>
           <a:p>
@@ -685,7 +596,7 @@
           <a:p>
             <a:fld id="{CF9FBDB8-36C6-4744-999D-C99C2C96D370}" type="datetimeFigureOut">
               <a:rPr lang="en-DE" smtClean="0"/>
-              <a:t>13.05.26</a:t>
+              <a:t>19.05.26</a:t>
             </a:fld>
             <a:endParaRPr lang="en-DE"/>
           </a:p>
@@ -736,7 +647,7 @@
     </p:spTree>
     <p:extLst>
       <p:ext uri="{BB962C8B-B14F-4D97-AF65-F5344CB8AC3E}">
-        <p14:creationId xmlns:p14="http://schemas.microsoft.com/office/powerpoint/2010/main" val="3186990123"/>
+        <p14:creationId xmlns:p14="http://schemas.microsoft.com/office/powerpoint/2010/main" val="138552346"/>
       </p:ext>
     </p:extLst>
   </p:cSld>
@@ -855,7 +766,7 @@
           <a:p>
             <a:fld id="{CF9FBDB8-36C6-4744-999D-C99C2C96D370}" type="datetimeFigureOut">
               <a:rPr lang="en-DE" smtClean="0"/>
-              <a:t>13.05.26</a:t>
+              <a:t>19.05.26</a:t>
             </a:fld>
             <a:endParaRPr lang="en-DE"/>
           </a:p>
@@ -906,7 +817,7 @@
     </p:spTree>
     <p:extLst>
       <p:ext uri="{BB962C8B-B14F-4D97-AF65-F5344CB8AC3E}">
-        <p14:creationId xmlns:p14="http://schemas.microsoft.com/office/powerpoint/2010/main" val="3526424159"/>
+        <p14:creationId xmlns:p14="http://schemas.microsoft.com/office/powerpoint/2010/main" val="729332948"/>
       </p:ext>
     </p:extLst>
   </p:cSld>
@@ -945,8 +856,8 @@
         </p:nvSpPr>
         <p:spPr>
           <a:xfrm>
-            <a:off x="1055395" y="48853"/>
-            <a:ext cx="318001" cy="777602"/>
+            <a:off x="1262157" y="48683"/>
+            <a:ext cx="380301" cy="774912"/>
           </a:xfrm>
         </p:spPr>
         <p:txBody>
@@ -973,8 +884,8 @@
         </p:nvSpPr>
         <p:spPr>
           <a:xfrm>
-            <a:off x="101391" y="48853"/>
-            <a:ext cx="935569" cy="777602"/>
+            <a:off x="121255" y="48683"/>
+            <a:ext cx="1118855" cy="774912"/>
           </a:xfrm>
         </p:spPr>
         <p:txBody>
@@ -1035,7 +946,7 @@
           <a:p>
             <a:fld id="{CF9FBDB8-36C6-4744-999D-C99C2C96D370}" type="datetimeFigureOut">
               <a:rPr lang="en-DE" smtClean="0"/>
-              <a:t>13.05.26</a:t>
+              <a:t>19.05.26</a:t>
             </a:fld>
             <a:endParaRPr lang="en-DE"/>
           </a:p>
@@ -1086,7 +997,7 @@
     </p:spTree>
     <p:extLst>
       <p:ext uri="{BB962C8B-B14F-4D97-AF65-F5344CB8AC3E}">
-        <p14:creationId xmlns:p14="http://schemas.microsoft.com/office/powerpoint/2010/main" val="2168273126"/>
+        <p14:creationId xmlns:p14="http://schemas.microsoft.com/office/powerpoint/2010/main" val="2914624619"/>
       </p:ext>
     </p:extLst>
   </p:cSld>
@@ -1205,7 +1116,7 @@
           <a:p>
             <a:fld id="{CF9FBDB8-36C6-4744-999D-C99C2C96D370}" type="datetimeFigureOut">
               <a:rPr lang="en-DE" smtClean="0"/>
-              <a:t>13.05.26</a:t>
+              <a:t>19.05.26</a:t>
             </a:fld>
             <a:endParaRPr lang="en-DE"/>
           </a:p>
@@ -1256,7 +1167,7 @@
     </p:spTree>
     <p:extLst>
       <p:ext uri="{BB962C8B-B14F-4D97-AF65-F5344CB8AC3E}">
-        <p14:creationId xmlns:p14="http://schemas.microsoft.com/office/powerpoint/2010/main" val="109301221"/>
+        <p14:creationId xmlns:p14="http://schemas.microsoft.com/office/powerpoint/2010/main" val="3733162775"/>
       </p:ext>
     </p:extLst>
   </p:cSld>
@@ -1295,15 +1206,15 @@
         </p:nvSpPr>
         <p:spPr>
           <a:xfrm>
-            <a:off x="100623" y="228757"/>
-            <a:ext cx="1272005" cy="381686"/>
+            <a:off x="120337" y="227965"/>
+            <a:ext cx="1521202" cy="380365"/>
           </a:xfrm>
         </p:spPr>
         <p:txBody>
           <a:bodyPr anchor="b"/>
           <a:lstStyle>
             <a:lvl1pPr>
-              <a:defRPr sz="726"/>
+              <a:defRPr sz="800"/>
             </a:lvl1pPr>
           </a:lstStyle>
           <a:p>
@@ -1327,8 +1238,8 @@
         </p:nvSpPr>
         <p:spPr>
           <a:xfrm>
-            <a:off x="100623" y="614053"/>
-            <a:ext cx="1272005" cy="200719"/>
+            <a:off x="120337" y="611928"/>
+            <a:ext cx="1521202" cy="200025"/>
           </a:xfrm>
         </p:spPr>
         <p:txBody>
@@ -1336,7 +1247,7 @@
           <a:lstStyle>
             <a:lvl1pPr marL="0" indent="0">
               <a:buNone/>
-              <a:defRPr sz="290">
+              <a:defRPr sz="320">
                 <a:solidFill>
                   <a:schemeClr val="tx1">
                     <a:tint val="82000"/>
@@ -1344,9 +1255,9 @@
                 </a:solidFill>
               </a:defRPr>
             </a:lvl1pPr>
-            <a:lvl2pPr marL="55321" indent="0">
-              <a:buNone/>
-              <a:defRPr sz="242">
+            <a:lvl2pPr marL="60945" indent="0">
+              <a:buNone/>
+              <a:defRPr sz="267">
                 <a:solidFill>
                   <a:schemeClr val="tx1">
                     <a:tint val="82000"/>
@@ -1354,9 +1265,9 @@
                 </a:solidFill>
               </a:defRPr>
             </a:lvl2pPr>
-            <a:lvl3pPr marL="110642" indent="0">
-              <a:buNone/>
-              <a:defRPr sz="218">
+            <a:lvl3pPr marL="121890" indent="0">
+              <a:buNone/>
+              <a:defRPr sz="240">
                 <a:solidFill>
                   <a:schemeClr val="tx1">
                     <a:tint val="82000"/>
@@ -1364,9 +1275,9 @@
                 </a:solidFill>
               </a:defRPr>
             </a:lvl3pPr>
-            <a:lvl4pPr marL="165964" indent="0">
-              <a:buNone/>
-              <a:defRPr sz="194">
+            <a:lvl4pPr marL="182834" indent="0">
+              <a:buNone/>
+              <a:defRPr sz="213">
                 <a:solidFill>
                   <a:schemeClr val="tx1">
                     <a:tint val="82000"/>
@@ -1374,9 +1285,9 @@
                 </a:solidFill>
               </a:defRPr>
             </a:lvl4pPr>
-            <a:lvl5pPr marL="221285" indent="0">
-              <a:buNone/>
-              <a:defRPr sz="194">
+            <a:lvl5pPr marL="243779" indent="0">
+              <a:buNone/>
+              <a:defRPr sz="213">
                 <a:solidFill>
                   <a:schemeClr val="tx1">
                     <a:tint val="82000"/>
@@ -1384,9 +1295,9 @@
                 </a:solidFill>
               </a:defRPr>
             </a:lvl5pPr>
-            <a:lvl6pPr marL="276606" indent="0">
-              <a:buNone/>
-              <a:defRPr sz="194">
+            <a:lvl6pPr marL="304724" indent="0">
+              <a:buNone/>
+              <a:defRPr sz="213">
                 <a:solidFill>
                   <a:schemeClr val="tx1">
                     <a:tint val="82000"/>
@@ -1394,9 +1305,9 @@
                 </a:solidFill>
               </a:defRPr>
             </a:lvl6pPr>
-            <a:lvl7pPr marL="331927" indent="0">
-              <a:buNone/>
-              <a:defRPr sz="194">
+            <a:lvl7pPr marL="365669" indent="0">
+              <a:buNone/>
+              <a:defRPr sz="213">
                 <a:solidFill>
                   <a:schemeClr val="tx1">
                     <a:tint val="82000"/>
@@ -1404,9 +1315,9 @@
                 </a:solidFill>
               </a:defRPr>
             </a:lvl7pPr>
-            <a:lvl8pPr marL="387248" indent="0">
-              <a:buNone/>
-              <a:defRPr sz="194">
+            <a:lvl8pPr marL="426613" indent="0">
+              <a:buNone/>
+              <a:defRPr sz="213">
                 <a:solidFill>
                   <a:schemeClr val="tx1">
                     <a:tint val="82000"/>
@@ -1414,9 +1325,9 @@
                 </a:solidFill>
               </a:defRPr>
             </a:lvl8pPr>
-            <a:lvl9pPr marL="442570" indent="0">
-              <a:buNone/>
-              <a:defRPr sz="194">
+            <a:lvl9pPr marL="487558" indent="0">
+              <a:buNone/>
+              <a:defRPr sz="213">
                 <a:solidFill>
                   <a:schemeClr val="tx1">
                     <a:tint val="82000"/>
@@ -1451,7 +1362,7 @@
           <a:p>
             <a:fld id="{CF9FBDB8-36C6-4744-999D-C99C2C96D370}" type="datetimeFigureOut">
               <a:rPr lang="en-DE" smtClean="0"/>
-              <a:t>13.05.26</a:t>
+              <a:t>19.05.26</a:t>
             </a:fld>
             <a:endParaRPr lang="en-DE"/>
           </a:p>
@@ -1502,7 +1413,7 @@
     </p:spTree>
     <p:extLst>
       <p:ext uri="{BB962C8B-B14F-4D97-AF65-F5344CB8AC3E}">
-        <p14:creationId xmlns:p14="http://schemas.microsoft.com/office/powerpoint/2010/main" val="1151320755"/>
+        <p14:creationId xmlns:p14="http://schemas.microsoft.com/office/powerpoint/2010/main" val="1584921063"/>
       </p:ext>
     </p:extLst>
   </p:cSld>
@@ -1564,8 +1475,8 @@
         </p:nvSpPr>
         <p:spPr>
           <a:xfrm>
-            <a:off x="101392" y="244262"/>
-            <a:ext cx="626785" cy="582193"/>
+            <a:off x="121255" y="243417"/>
+            <a:ext cx="749578" cy="580178"/>
           </a:xfrm>
         </p:spPr>
         <p:txBody>
@@ -1621,8 +1532,8 @@
         </p:nvSpPr>
         <p:spPr>
           <a:xfrm>
-            <a:off x="746611" y="244262"/>
-            <a:ext cx="626785" cy="582193"/>
+            <a:off x="892880" y="243417"/>
+            <a:ext cx="749578" cy="580178"/>
           </a:xfrm>
         </p:spPr>
         <p:txBody>
@@ -1683,7 +1594,7 @@
           <a:p>
             <a:fld id="{CF9FBDB8-36C6-4744-999D-C99C2C96D370}" type="datetimeFigureOut">
               <a:rPr lang="en-DE" smtClean="0"/>
-              <a:t>13.05.26</a:t>
+              <a:t>19.05.26</a:t>
             </a:fld>
             <a:endParaRPr lang="en-DE"/>
           </a:p>
@@ -1734,7 +1645,7 @@
     </p:spTree>
     <p:extLst>
       <p:ext uri="{BB962C8B-B14F-4D97-AF65-F5344CB8AC3E}">
-        <p14:creationId xmlns:p14="http://schemas.microsoft.com/office/powerpoint/2010/main" val="601069590"/>
+        <p14:creationId xmlns:p14="http://schemas.microsoft.com/office/powerpoint/2010/main" val="3903016252"/>
       </p:ext>
     </p:extLst>
   </p:cSld>
@@ -1773,8 +1684,8 @@
         </p:nvSpPr>
         <p:spPr>
           <a:xfrm>
-            <a:off x="101584" y="48853"/>
-            <a:ext cx="1272005" cy="177355"/>
+            <a:off x="121485" y="48683"/>
+            <a:ext cx="1521202" cy="176742"/>
           </a:xfrm>
         </p:spPr>
         <p:txBody>
@@ -1801,8 +1712,8 @@
         </p:nvSpPr>
         <p:spPr>
           <a:xfrm>
-            <a:off x="101584" y="224934"/>
-            <a:ext cx="623904" cy="110236"/>
+            <a:off x="121485" y="224155"/>
+            <a:ext cx="746133" cy="109855"/>
           </a:xfrm>
         </p:spPr>
         <p:txBody>
@@ -1810,39 +1721,39 @@
           <a:lstStyle>
             <a:lvl1pPr marL="0" indent="0">
               <a:buNone/>
-              <a:defRPr sz="290" b="1"/>
+              <a:defRPr sz="320" b="1"/>
             </a:lvl1pPr>
-            <a:lvl2pPr marL="55321" indent="0">
-              <a:buNone/>
-              <a:defRPr sz="242" b="1"/>
+            <a:lvl2pPr marL="60945" indent="0">
+              <a:buNone/>
+              <a:defRPr sz="267" b="1"/>
             </a:lvl2pPr>
-            <a:lvl3pPr marL="110642" indent="0">
-              <a:buNone/>
-              <a:defRPr sz="218" b="1"/>
+            <a:lvl3pPr marL="121890" indent="0">
+              <a:buNone/>
+              <a:defRPr sz="240" b="1"/>
             </a:lvl3pPr>
-            <a:lvl4pPr marL="165964" indent="0">
-              <a:buNone/>
-              <a:defRPr sz="194" b="1"/>
+            <a:lvl4pPr marL="182834" indent="0">
+              <a:buNone/>
+              <a:defRPr sz="213" b="1"/>
             </a:lvl4pPr>
-            <a:lvl5pPr marL="221285" indent="0">
-              <a:buNone/>
-              <a:defRPr sz="194" b="1"/>
+            <a:lvl5pPr marL="243779" indent="0">
+              <a:buNone/>
+              <a:defRPr sz="213" b="1"/>
             </a:lvl5pPr>
-            <a:lvl6pPr marL="276606" indent="0">
-              <a:buNone/>
-              <a:defRPr sz="194" b="1"/>
+            <a:lvl6pPr marL="304724" indent="0">
+              <a:buNone/>
+              <a:defRPr sz="213" b="1"/>
             </a:lvl6pPr>
-            <a:lvl7pPr marL="331927" indent="0">
-              <a:buNone/>
-              <a:defRPr sz="194" b="1"/>
+            <a:lvl7pPr marL="365669" indent="0">
+              <a:buNone/>
+              <a:defRPr sz="213" b="1"/>
             </a:lvl7pPr>
-            <a:lvl8pPr marL="387248" indent="0">
-              <a:buNone/>
-              <a:defRPr sz="194" b="1"/>
+            <a:lvl8pPr marL="426613" indent="0">
+              <a:buNone/>
+              <a:defRPr sz="213" b="1"/>
             </a:lvl8pPr>
-            <a:lvl9pPr marL="442570" indent="0">
-              <a:buNone/>
-              <a:defRPr sz="194" b="1"/>
+            <a:lvl9pPr marL="487558" indent="0">
+              <a:buNone/>
+              <a:defRPr sz="213" b="1"/>
             </a:lvl9pPr>
           </a:lstStyle>
           <a:p>
@@ -1866,8 +1777,8 @@
         </p:nvSpPr>
         <p:spPr>
           <a:xfrm>
-            <a:off x="101584" y="335170"/>
-            <a:ext cx="623904" cy="492984"/>
+            <a:off x="121485" y="334010"/>
+            <a:ext cx="746133" cy="491278"/>
           </a:xfrm>
         </p:spPr>
         <p:txBody>
@@ -1923,8 +1834,8 @@
         </p:nvSpPr>
         <p:spPr>
           <a:xfrm>
-            <a:off x="746611" y="224934"/>
-            <a:ext cx="626977" cy="110236"/>
+            <a:off x="892880" y="224155"/>
+            <a:ext cx="749808" cy="109855"/>
           </a:xfrm>
         </p:spPr>
         <p:txBody>
@@ -1932,39 +1843,39 @@
           <a:lstStyle>
             <a:lvl1pPr marL="0" indent="0">
               <a:buNone/>
-              <a:defRPr sz="290" b="1"/>
+              <a:defRPr sz="320" b="1"/>
             </a:lvl1pPr>
-            <a:lvl2pPr marL="55321" indent="0">
-              <a:buNone/>
-              <a:defRPr sz="242" b="1"/>
+            <a:lvl2pPr marL="60945" indent="0">
+              <a:buNone/>
+              <a:defRPr sz="267" b="1"/>
             </a:lvl2pPr>
-            <a:lvl3pPr marL="110642" indent="0">
-              <a:buNone/>
-              <a:defRPr sz="218" b="1"/>
+            <a:lvl3pPr marL="121890" indent="0">
+              <a:buNone/>
+              <a:defRPr sz="240" b="1"/>
             </a:lvl3pPr>
-            <a:lvl4pPr marL="165964" indent="0">
-              <a:buNone/>
-              <a:defRPr sz="194" b="1"/>
+            <a:lvl4pPr marL="182834" indent="0">
+              <a:buNone/>
+              <a:defRPr sz="213" b="1"/>
             </a:lvl4pPr>
-            <a:lvl5pPr marL="221285" indent="0">
-              <a:buNone/>
-              <a:defRPr sz="194" b="1"/>
+            <a:lvl5pPr marL="243779" indent="0">
+              <a:buNone/>
+              <a:defRPr sz="213" b="1"/>
             </a:lvl5pPr>
-            <a:lvl6pPr marL="276606" indent="0">
-              <a:buNone/>
-              <a:defRPr sz="194" b="1"/>
+            <a:lvl6pPr marL="304724" indent="0">
+              <a:buNone/>
+              <a:defRPr sz="213" b="1"/>
             </a:lvl6pPr>
-            <a:lvl7pPr marL="331927" indent="0">
-              <a:buNone/>
-              <a:defRPr sz="194" b="1"/>
+            <a:lvl7pPr marL="365669" indent="0">
+              <a:buNone/>
+              <a:defRPr sz="213" b="1"/>
             </a:lvl7pPr>
-            <a:lvl8pPr marL="387248" indent="0">
-              <a:buNone/>
-              <a:defRPr sz="194" b="1"/>
+            <a:lvl8pPr marL="426613" indent="0">
+              <a:buNone/>
+              <a:defRPr sz="213" b="1"/>
             </a:lvl8pPr>
-            <a:lvl9pPr marL="442570" indent="0">
-              <a:buNone/>
-              <a:defRPr sz="194" b="1"/>
+            <a:lvl9pPr marL="487558" indent="0">
+              <a:buNone/>
+              <a:defRPr sz="213" b="1"/>
             </a:lvl9pPr>
           </a:lstStyle>
           <a:p>
@@ -1988,8 +1899,8 @@
         </p:nvSpPr>
         <p:spPr>
           <a:xfrm>
-            <a:off x="746611" y="335170"/>
-            <a:ext cx="626977" cy="492984"/>
+            <a:off x="892880" y="334010"/>
+            <a:ext cx="749808" cy="491278"/>
           </a:xfrm>
         </p:spPr>
         <p:txBody>
@@ -2050,7 +1961,7 @@
           <a:p>
             <a:fld id="{CF9FBDB8-36C6-4744-999D-C99C2C96D370}" type="datetimeFigureOut">
               <a:rPr lang="en-DE" smtClean="0"/>
-              <a:t>13.05.26</a:t>
+              <a:t>19.05.26</a:t>
             </a:fld>
             <a:endParaRPr lang="en-DE"/>
           </a:p>
@@ -2101,7 +2012,7 @@
     </p:spTree>
     <p:extLst>
       <p:ext uri="{BB962C8B-B14F-4D97-AF65-F5344CB8AC3E}">
-        <p14:creationId xmlns:p14="http://schemas.microsoft.com/office/powerpoint/2010/main" val="154787153"/>
+        <p14:creationId xmlns:p14="http://schemas.microsoft.com/office/powerpoint/2010/main" val="3486189257"/>
       </p:ext>
     </p:extLst>
   </p:cSld>
@@ -2168,7 +2079,7 @@
           <a:p>
             <a:fld id="{CF9FBDB8-36C6-4744-999D-C99C2C96D370}" type="datetimeFigureOut">
               <a:rPr lang="en-DE" smtClean="0"/>
-              <a:t>13.05.26</a:t>
+              <a:t>19.05.26</a:t>
             </a:fld>
             <a:endParaRPr lang="en-DE"/>
           </a:p>
@@ -2219,7 +2130,7 @@
     </p:spTree>
     <p:extLst>
       <p:ext uri="{BB962C8B-B14F-4D97-AF65-F5344CB8AC3E}">
-        <p14:creationId xmlns:p14="http://schemas.microsoft.com/office/powerpoint/2010/main" val="2096617080"/>
+        <p14:creationId xmlns:p14="http://schemas.microsoft.com/office/powerpoint/2010/main" val="434736162"/>
       </p:ext>
     </p:extLst>
   </p:cSld>
@@ -2263,7 +2174,7 @@
           <a:p>
             <a:fld id="{CF9FBDB8-36C6-4744-999D-C99C2C96D370}" type="datetimeFigureOut">
               <a:rPr lang="en-DE" smtClean="0"/>
-              <a:t>13.05.26</a:t>
+              <a:t>19.05.26</a:t>
             </a:fld>
             <a:endParaRPr lang="en-DE"/>
           </a:p>
@@ -2314,7 +2225,7 @@
     </p:spTree>
     <p:extLst>
       <p:ext uri="{BB962C8B-B14F-4D97-AF65-F5344CB8AC3E}">
-        <p14:creationId xmlns:p14="http://schemas.microsoft.com/office/powerpoint/2010/main" val="2936472653"/>
+        <p14:creationId xmlns:p14="http://schemas.microsoft.com/office/powerpoint/2010/main" val="3408483045"/>
       </p:ext>
     </p:extLst>
   </p:cSld>
@@ -2353,15 +2264,15 @@
         </p:nvSpPr>
         <p:spPr>
           <a:xfrm>
-            <a:off x="101584" y="61172"/>
-            <a:ext cx="475657" cy="214101"/>
+            <a:off x="121485" y="60960"/>
+            <a:ext cx="568843" cy="213360"/>
           </a:xfrm>
         </p:spPr>
         <p:txBody>
           <a:bodyPr anchor="b"/>
           <a:lstStyle>
             <a:lvl1pPr>
-              <a:defRPr sz="387"/>
+              <a:defRPr sz="427"/>
             </a:lvl1pPr>
           </a:lstStyle>
           <a:p>
@@ -2385,39 +2296,39 @@
         </p:nvSpPr>
         <p:spPr>
           <a:xfrm>
-            <a:off x="626977" y="132114"/>
-            <a:ext cx="746611" cy="652073"/>
+            <a:off x="749808" y="131657"/>
+            <a:ext cx="892880" cy="649817"/>
           </a:xfrm>
         </p:spPr>
         <p:txBody>
           <a:bodyPr/>
           <a:lstStyle>
             <a:lvl1pPr>
-              <a:defRPr sz="387"/>
+              <a:defRPr sz="427"/>
             </a:lvl1pPr>
             <a:lvl2pPr>
-              <a:defRPr sz="339"/>
+              <a:defRPr sz="373"/>
             </a:lvl2pPr>
             <a:lvl3pPr>
-              <a:defRPr sz="290"/>
+              <a:defRPr sz="320"/>
             </a:lvl3pPr>
             <a:lvl4pPr>
-              <a:defRPr sz="242"/>
+              <a:defRPr sz="267"/>
             </a:lvl4pPr>
             <a:lvl5pPr>
-              <a:defRPr sz="242"/>
+              <a:defRPr sz="267"/>
             </a:lvl5pPr>
             <a:lvl6pPr>
-              <a:defRPr sz="242"/>
+              <a:defRPr sz="267"/>
             </a:lvl6pPr>
             <a:lvl7pPr>
-              <a:defRPr sz="242"/>
+              <a:defRPr sz="267"/>
             </a:lvl7pPr>
             <a:lvl8pPr>
-              <a:defRPr sz="242"/>
+              <a:defRPr sz="267"/>
             </a:lvl8pPr>
             <a:lvl9pPr>
-              <a:defRPr sz="242"/>
+              <a:defRPr sz="267"/>
             </a:lvl9pPr>
           </a:lstStyle>
           <a:p>
@@ -2470,8 +2381,8 @@
         </p:nvSpPr>
         <p:spPr>
           <a:xfrm>
-            <a:off x="101584" y="275273"/>
-            <a:ext cx="475657" cy="509976"/>
+            <a:off x="121485" y="274320"/>
+            <a:ext cx="568843" cy="508212"/>
           </a:xfrm>
         </p:spPr>
         <p:txBody>
@@ -2479,39 +2390,39 @@
           <a:lstStyle>
             <a:lvl1pPr marL="0" indent="0">
               <a:buNone/>
-              <a:defRPr sz="194"/>
+              <a:defRPr sz="213"/>
             </a:lvl1pPr>
-            <a:lvl2pPr marL="55321" indent="0">
-              <a:buNone/>
-              <a:defRPr sz="169"/>
+            <a:lvl2pPr marL="60945" indent="0">
+              <a:buNone/>
+              <a:defRPr sz="187"/>
             </a:lvl2pPr>
-            <a:lvl3pPr marL="110642" indent="0">
-              <a:buNone/>
-              <a:defRPr sz="145"/>
+            <a:lvl3pPr marL="121890" indent="0">
+              <a:buNone/>
+              <a:defRPr sz="160"/>
             </a:lvl3pPr>
-            <a:lvl4pPr marL="165964" indent="0">
-              <a:buNone/>
-              <a:defRPr sz="121"/>
+            <a:lvl4pPr marL="182834" indent="0">
+              <a:buNone/>
+              <a:defRPr sz="133"/>
             </a:lvl4pPr>
-            <a:lvl5pPr marL="221285" indent="0">
-              <a:buNone/>
-              <a:defRPr sz="121"/>
+            <a:lvl5pPr marL="243779" indent="0">
+              <a:buNone/>
+              <a:defRPr sz="133"/>
             </a:lvl5pPr>
-            <a:lvl6pPr marL="276606" indent="0">
-              <a:buNone/>
-              <a:defRPr sz="121"/>
+            <a:lvl6pPr marL="304724" indent="0">
+              <a:buNone/>
+              <a:defRPr sz="133"/>
             </a:lvl6pPr>
-            <a:lvl7pPr marL="331927" indent="0">
-              <a:buNone/>
-              <a:defRPr sz="121"/>
+            <a:lvl7pPr marL="365669" indent="0">
+              <a:buNone/>
+              <a:defRPr sz="133"/>
             </a:lvl7pPr>
-            <a:lvl8pPr marL="387248" indent="0">
-              <a:buNone/>
-              <a:defRPr sz="121"/>
+            <a:lvl8pPr marL="426613" indent="0">
+              <a:buNone/>
+              <a:defRPr sz="133"/>
             </a:lvl8pPr>
-            <a:lvl9pPr marL="442570" indent="0">
-              <a:buNone/>
-              <a:defRPr sz="121"/>
+            <a:lvl9pPr marL="487558" indent="0">
+              <a:buNone/>
+              <a:defRPr sz="133"/>
             </a:lvl9pPr>
           </a:lstStyle>
           <a:p>
@@ -2540,7 +2451,7 @@
           <a:p>
             <a:fld id="{CF9FBDB8-36C6-4744-999D-C99C2C96D370}" type="datetimeFigureOut">
               <a:rPr lang="en-DE" smtClean="0"/>
-              <a:t>13.05.26</a:t>
+              <a:t>19.05.26</a:t>
             </a:fld>
             <a:endParaRPr lang="en-DE"/>
           </a:p>
@@ -2591,7 +2502,7 @@
     </p:spTree>
     <p:extLst>
       <p:ext uri="{BB962C8B-B14F-4D97-AF65-F5344CB8AC3E}">
-        <p14:creationId xmlns:p14="http://schemas.microsoft.com/office/powerpoint/2010/main" val="848983327"/>
+        <p14:creationId xmlns:p14="http://schemas.microsoft.com/office/powerpoint/2010/main" val="1068013671"/>
       </p:ext>
     </p:extLst>
   </p:cSld>
@@ -2630,15 +2541,15 @@
         </p:nvSpPr>
         <p:spPr>
           <a:xfrm>
-            <a:off x="101584" y="61172"/>
-            <a:ext cx="475657" cy="214101"/>
+            <a:off x="121485" y="60960"/>
+            <a:ext cx="568843" cy="213360"/>
           </a:xfrm>
         </p:spPr>
         <p:txBody>
           <a:bodyPr anchor="b"/>
           <a:lstStyle>
             <a:lvl1pPr>
-              <a:defRPr sz="387"/>
+              <a:defRPr sz="427"/>
             </a:lvl1pPr>
           </a:lstStyle>
           <a:p>
@@ -2662,8 +2573,8 @@
         </p:nvSpPr>
         <p:spPr>
           <a:xfrm>
-            <a:off x="626977" y="132114"/>
-            <a:ext cx="746611" cy="652073"/>
+            <a:off x="749808" y="131657"/>
+            <a:ext cx="892880" cy="649817"/>
           </a:xfrm>
         </p:spPr>
         <p:txBody>
@@ -2671,39 +2582,39 @@
           <a:lstStyle>
             <a:lvl1pPr marL="0" indent="0">
               <a:buNone/>
-              <a:defRPr sz="387"/>
+              <a:defRPr sz="427"/>
             </a:lvl1pPr>
-            <a:lvl2pPr marL="55321" indent="0">
-              <a:buNone/>
-              <a:defRPr sz="339"/>
+            <a:lvl2pPr marL="60945" indent="0">
+              <a:buNone/>
+              <a:defRPr sz="373"/>
             </a:lvl2pPr>
-            <a:lvl3pPr marL="110642" indent="0">
-              <a:buNone/>
-              <a:defRPr sz="290"/>
+            <a:lvl3pPr marL="121890" indent="0">
+              <a:buNone/>
+              <a:defRPr sz="320"/>
             </a:lvl3pPr>
-            <a:lvl4pPr marL="165964" indent="0">
-              <a:buNone/>
-              <a:defRPr sz="242"/>
+            <a:lvl4pPr marL="182834" indent="0">
+              <a:buNone/>
+              <a:defRPr sz="267"/>
             </a:lvl4pPr>
-            <a:lvl5pPr marL="221285" indent="0">
-              <a:buNone/>
-              <a:defRPr sz="242"/>
+            <a:lvl5pPr marL="243779" indent="0">
+              <a:buNone/>
+              <a:defRPr sz="267"/>
             </a:lvl5pPr>
-            <a:lvl6pPr marL="276606" indent="0">
-              <a:buNone/>
-              <a:defRPr sz="242"/>
+            <a:lvl6pPr marL="304724" indent="0">
+              <a:buNone/>
+              <a:defRPr sz="267"/>
             </a:lvl6pPr>
-            <a:lvl7pPr marL="331927" indent="0">
-              <a:buNone/>
-              <a:defRPr sz="242"/>
+            <a:lvl7pPr marL="365669" indent="0">
+              <a:buNone/>
+              <a:defRPr sz="267"/>
             </a:lvl7pPr>
-            <a:lvl8pPr marL="387248" indent="0">
-              <a:buNone/>
-              <a:defRPr sz="242"/>
+            <a:lvl8pPr marL="426613" indent="0">
+              <a:buNone/>
+              <a:defRPr sz="267"/>
             </a:lvl8pPr>
-            <a:lvl9pPr marL="442570" indent="0">
-              <a:buNone/>
-              <a:defRPr sz="242"/>
+            <a:lvl9pPr marL="487558" indent="0">
+              <a:buNone/>
+              <a:defRPr sz="267"/>
             </a:lvl9pPr>
           </a:lstStyle>
           <a:p>
@@ -2727,8 +2638,8 @@
         </p:nvSpPr>
         <p:spPr>
           <a:xfrm>
-            <a:off x="101584" y="275273"/>
-            <a:ext cx="475657" cy="509976"/>
+            <a:off x="121485" y="274320"/>
+            <a:ext cx="568843" cy="508212"/>
           </a:xfrm>
         </p:spPr>
         <p:txBody>
@@ -2736,39 +2647,39 @@
           <a:lstStyle>
             <a:lvl1pPr marL="0" indent="0">
               <a:buNone/>
-              <a:defRPr sz="194"/>
+              <a:defRPr sz="213"/>
             </a:lvl1pPr>
-            <a:lvl2pPr marL="55321" indent="0">
-              <a:buNone/>
-              <a:defRPr sz="169"/>
+            <a:lvl2pPr marL="60945" indent="0">
+              <a:buNone/>
+              <a:defRPr sz="187"/>
             </a:lvl2pPr>
-            <a:lvl3pPr marL="110642" indent="0">
-              <a:buNone/>
-              <a:defRPr sz="145"/>
+            <a:lvl3pPr marL="121890" indent="0">
+              <a:buNone/>
+              <a:defRPr sz="160"/>
             </a:lvl3pPr>
-            <a:lvl4pPr marL="165964" indent="0">
-              <a:buNone/>
-              <a:defRPr sz="121"/>
+            <a:lvl4pPr marL="182834" indent="0">
+              <a:buNone/>
+              <a:defRPr sz="133"/>
             </a:lvl4pPr>
-            <a:lvl5pPr marL="221285" indent="0">
-              <a:buNone/>
-              <a:defRPr sz="121"/>
+            <a:lvl5pPr marL="243779" indent="0">
+              <a:buNone/>
+              <a:defRPr sz="133"/>
             </a:lvl5pPr>
-            <a:lvl6pPr marL="276606" indent="0">
-              <a:buNone/>
-              <a:defRPr sz="121"/>
+            <a:lvl6pPr marL="304724" indent="0">
+              <a:buNone/>
+              <a:defRPr sz="133"/>
             </a:lvl6pPr>
-            <a:lvl7pPr marL="331927" indent="0">
-              <a:buNone/>
-              <a:defRPr sz="121"/>
+            <a:lvl7pPr marL="365669" indent="0">
+              <a:buNone/>
+              <a:defRPr sz="133"/>
             </a:lvl7pPr>
-            <a:lvl8pPr marL="387248" indent="0">
-              <a:buNone/>
-              <a:defRPr sz="121"/>
+            <a:lvl8pPr marL="426613" indent="0">
+              <a:buNone/>
+              <a:defRPr sz="133"/>
             </a:lvl8pPr>
-            <a:lvl9pPr marL="442570" indent="0">
-              <a:buNone/>
-              <a:defRPr sz="121"/>
+            <a:lvl9pPr marL="487558" indent="0">
+              <a:buNone/>
+              <a:defRPr sz="133"/>
             </a:lvl9pPr>
           </a:lstStyle>
           <a:p>
@@ -2797,7 +2708,7 @@
           <a:p>
             <a:fld id="{CF9FBDB8-36C6-4744-999D-C99C2C96D370}" type="datetimeFigureOut">
               <a:rPr lang="en-DE" smtClean="0"/>
-              <a:t>13.05.26</a:t>
+              <a:t>19.05.26</a:t>
             </a:fld>
             <a:endParaRPr lang="en-DE"/>
           </a:p>
@@ -2848,7 +2759,7 @@
     </p:spTree>
     <p:extLst>
       <p:ext uri="{BB962C8B-B14F-4D97-AF65-F5344CB8AC3E}">
-        <p14:creationId xmlns:p14="http://schemas.microsoft.com/office/powerpoint/2010/main" val="2990114420"/>
+        <p14:creationId xmlns:p14="http://schemas.microsoft.com/office/powerpoint/2010/main" val="1080489281"/>
       </p:ext>
     </p:extLst>
   </p:cSld>
@@ -2892,8 +2803,8 @@
         </p:nvSpPr>
         <p:spPr>
           <a:xfrm>
-            <a:off x="101392" y="48853"/>
-            <a:ext cx="1272005" cy="177355"/>
+            <a:off x="121256" y="48683"/>
+            <a:ext cx="1521202" cy="176742"/>
           </a:xfrm>
           <a:prstGeom prst="rect">
             <a:avLst/>
@@ -2925,8 +2836,8 @@
         </p:nvSpPr>
         <p:spPr>
           <a:xfrm>
-            <a:off x="101392" y="244262"/>
-            <a:ext cx="1272005" cy="582193"/>
+            <a:off x="121256" y="243417"/>
+            <a:ext cx="1521202" cy="580178"/>
           </a:xfrm>
           <a:prstGeom prst="rect">
             <a:avLst/>
@@ -2987,8 +2898,8 @@
         </p:nvSpPr>
         <p:spPr>
           <a:xfrm>
-            <a:off x="101392" y="850456"/>
-            <a:ext cx="331827" cy="48852"/>
+            <a:off x="121255" y="847514"/>
+            <a:ext cx="396835" cy="48683"/>
           </a:xfrm>
           <a:prstGeom prst="rect">
             <a:avLst/>
@@ -2998,7 +2909,7 @@
           <a:bodyPr vert="horz" lIns="91440" tIns="45720" rIns="91440" bIns="45720" rtlCol="0" anchor="ctr"/>
           <a:lstStyle>
             <a:lvl1pPr algn="l">
-              <a:defRPr sz="145">
+              <a:defRPr sz="160">
                 <a:solidFill>
                   <a:schemeClr val="tx1">
                     <a:tint val="82000"/>
@@ -3010,7 +2921,7 @@
           <a:p>
             <a:fld id="{CF9FBDB8-36C6-4744-999D-C99C2C96D370}" type="datetimeFigureOut">
               <a:rPr lang="en-DE" smtClean="0"/>
-              <a:t>13.05.26</a:t>
+              <a:t>19.05.26</a:t>
             </a:fld>
             <a:endParaRPr lang="en-DE"/>
           </a:p>
@@ -3028,8 +2939,8 @@
         </p:nvSpPr>
         <p:spPr>
           <a:xfrm>
-            <a:off x="488524" y="850456"/>
-            <a:ext cx="497741" cy="48852"/>
+            <a:off x="584230" y="847514"/>
+            <a:ext cx="595253" cy="48683"/>
           </a:xfrm>
           <a:prstGeom prst="rect">
             <a:avLst/>
@@ -3039,7 +2950,7 @@
           <a:bodyPr vert="horz" lIns="91440" tIns="45720" rIns="91440" bIns="45720" rtlCol="0" anchor="ctr"/>
           <a:lstStyle>
             <a:lvl1pPr algn="ctr">
-              <a:defRPr sz="145">
+              <a:defRPr sz="160">
                 <a:solidFill>
                   <a:schemeClr val="tx1">
                     <a:tint val="82000"/>
@@ -3065,8 +2976,8 @@
         </p:nvSpPr>
         <p:spPr>
           <a:xfrm>
-            <a:off x="1041569" y="850456"/>
-            <a:ext cx="331827" cy="48852"/>
+            <a:off x="1245623" y="847514"/>
+            <a:ext cx="396835" cy="48683"/>
           </a:xfrm>
           <a:prstGeom prst="rect">
             <a:avLst/>
@@ -3076,7 +2987,7 @@
           <a:bodyPr vert="horz" lIns="91440" tIns="45720" rIns="91440" bIns="45720" rtlCol="0" anchor="ctr"/>
           <a:lstStyle>
             <a:lvl1pPr algn="r">
-              <a:defRPr sz="145">
+              <a:defRPr sz="160">
                 <a:solidFill>
                   <a:schemeClr val="tx1">
                     <a:tint val="82000"/>
@@ -3097,27 +3008,27 @@
     </p:spTree>
     <p:extLst>
       <p:ext uri="{BB962C8B-B14F-4D97-AF65-F5344CB8AC3E}">
-        <p14:creationId xmlns:p14="http://schemas.microsoft.com/office/powerpoint/2010/main" val="1927964657"/>
+        <p14:creationId xmlns:p14="http://schemas.microsoft.com/office/powerpoint/2010/main" val="3374512086"/>
       </p:ext>
     </p:extLst>
   </p:cSld>
   <p:clrMap bg1="lt1" tx1="dk1" bg2="lt2" tx2="dk2" accent1="accent1" accent2="accent2" accent3="accent3" accent4="accent4" accent5="accent5" accent6="accent6" hlink="hlink" folHlink="folHlink"/>
   <p:sldLayoutIdLst>
-    <p:sldLayoutId id="2147484033" r:id="rId1"/>
-    <p:sldLayoutId id="2147484034" r:id="rId2"/>
-    <p:sldLayoutId id="2147484035" r:id="rId3"/>
-    <p:sldLayoutId id="2147484036" r:id="rId4"/>
-    <p:sldLayoutId id="2147484037" r:id="rId5"/>
-    <p:sldLayoutId id="2147484038" r:id="rId6"/>
-    <p:sldLayoutId id="2147484039" r:id="rId7"/>
-    <p:sldLayoutId id="2147484040" r:id="rId8"/>
-    <p:sldLayoutId id="2147484041" r:id="rId9"/>
-    <p:sldLayoutId id="2147484042" r:id="rId10"/>
-    <p:sldLayoutId id="2147484043" r:id="rId11"/>
+    <p:sldLayoutId id="2147483949" r:id="rId1"/>
+    <p:sldLayoutId id="2147483950" r:id="rId2"/>
+    <p:sldLayoutId id="2147483951" r:id="rId3"/>
+    <p:sldLayoutId id="2147483952" r:id="rId4"/>
+    <p:sldLayoutId id="2147483953" r:id="rId5"/>
+    <p:sldLayoutId id="2147483954" r:id="rId6"/>
+    <p:sldLayoutId id="2147483955" r:id="rId7"/>
+    <p:sldLayoutId id="2147483956" r:id="rId8"/>
+    <p:sldLayoutId id="2147483957" r:id="rId9"/>
+    <p:sldLayoutId id="2147483958" r:id="rId10"/>
+    <p:sldLayoutId id="2147483959" r:id="rId11"/>
   </p:sldLayoutIdLst>
   <p:txStyles>
     <p:titleStyle>
-      <a:lvl1pPr algn="l" defTabSz="110642" rtl="0" eaLnBrk="1" latinLnBrk="0" hangingPunct="1">
+      <a:lvl1pPr algn="l" defTabSz="121890" rtl="0" eaLnBrk="1" latinLnBrk="0" hangingPunct="1">
         <a:lnSpc>
           <a:spcPct val="90000"/>
         </a:lnSpc>
@@ -3125,7 +3036,7 @@
           <a:spcPct val="0"/>
         </a:spcBef>
         <a:buNone/>
-        <a:defRPr sz="532" kern="1200">
+        <a:defRPr sz="587" kern="1200">
           <a:solidFill>
             <a:schemeClr val="tx1"/>
           </a:solidFill>
@@ -3136,16 +3047,16 @@
       </a:lvl1pPr>
     </p:titleStyle>
     <p:bodyStyle>
-      <a:lvl1pPr marL="27661" indent="-27661" algn="l" defTabSz="110642" rtl="0" eaLnBrk="1" latinLnBrk="0" hangingPunct="1">
+      <a:lvl1pPr marL="30472" indent="-30472" algn="l" defTabSz="121890" rtl="0" eaLnBrk="1" latinLnBrk="0" hangingPunct="1">
         <a:lnSpc>
           <a:spcPct val="90000"/>
         </a:lnSpc>
         <a:spcBef>
-          <a:spcPts val="121"/>
+          <a:spcPts val="133"/>
         </a:spcBef>
         <a:buFont typeface="Arial" panose="020B0604020202020204" pitchFamily="34" charset="0"/>
         <a:buChar char="•"/>
-        <a:defRPr sz="339" kern="1200">
+        <a:defRPr sz="373" kern="1200">
           <a:solidFill>
             <a:schemeClr val="tx1"/>
           </a:solidFill>
@@ -3154,16 +3065,16 @@
           <a:cs typeface="+mn-cs"/>
         </a:defRPr>
       </a:lvl1pPr>
-      <a:lvl2pPr marL="82982" indent="-27661" algn="l" defTabSz="110642" rtl="0" eaLnBrk="1" latinLnBrk="0" hangingPunct="1">
+      <a:lvl2pPr marL="91417" indent="-30472" algn="l" defTabSz="121890" rtl="0" eaLnBrk="1" latinLnBrk="0" hangingPunct="1">
         <a:lnSpc>
           <a:spcPct val="90000"/>
         </a:lnSpc>
         <a:spcBef>
-          <a:spcPts val="61"/>
+          <a:spcPts val="67"/>
         </a:spcBef>
         <a:buFont typeface="Arial" panose="020B0604020202020204" pitchFamily="34" charset="0"/>
         <a:buChar char="•"/>
-        <a:defRPr sz="290" kern="1200">
+        <a:defRPr sz="320" kern="1200">
           <a:solidFill>
             <a:schemeClr val="tx1"/>
           </a:solidFill>
@@ -3172,16 +3083,16 @@
           <a:cs typeface="+mn-cs"/>
         </a:defRPr>
       </a:lvl2pPr>
-      <a:lvl3pPr marL="138303" indent="-27661" algn="l" defTabSz="110642" rtl="0" eaLnBrk="1" latinLnBrk="0" hangingPunct="1">
+      <a:lvl3pPr marL="152362" indent="-30472" algn="l" defTabSz="121890" rtl="0" eaLnBrk="1" latinLnBrk="0" hangingPunct="1">
         <a:lnSpc>
           <a:spcPct val="90000"/>
         </a:lnSpc>
         <a:spcBef>
-          <a:spcPts val="61"/>
+          <a:spcPts val="67"/>
         </a:spcBef>
         <a:buFont typeface="Arial" panose="020B0604020202020204" pitchFamily="34" charset="0"/>
         <a:buChar char="•"/>
-        <a:defRPr sz="242" kern="1200">
+        <a:defRPr sz="267" kern="1200">
           <a:solidFill>
             <a:schemeClr val="tx1"/>
           </a:solidFill>
@@ -3190,16 +3101,16 @@
           <a:cs typeface="+mn-cs"/>
         </a:defRPr>
       </a:lvl3pPr>
-      <a:lvl4pPr marL="193624" indent="-27661" algn="l" defTabSz="110642" rtl="0" eaLnBrk="1" latinLnBrk="0" hangingPunct="1">
+      <a:lvl4pPr marL="213307" indent="-30472" algn="l" defTabSz="121890" rtl="0" eaLnBrk="1" latinLnBrk="0" hangingPunct="1">
         <a:lnSpc>
           <a:spcPct val="90000"/>
         </a:lnSpc>
         <a:spcBef>
-          <a:spcPts val="61"/>
+          <a:spcPts val="67"/>
         </a:spcBef>
         <a:buFont typeface="Arial" panose="020B0604020202020204" pitchFamily="34" charset="0"/>
         <a:buChar char="•"/>
-        <a:defRPr sz="218" kern="1200">
+        <a:defRPr sz="240" kern="1200">
           <a:solidFill>
             <a:schemeClr val="tx1"/>
           </a:solidFill>
@@ -3208,16 +3119,16 @@
           <a:cs typeface="+mn-cs"/>
         </a:defRPr>
       </a:lvl4pPr>
-      <a:lvl5pPr marL="248945" indent="-27661" algn="l" defTabSz="110642" rtl="0" eaLnBrk="1" latinLnBrk="0" hangingPunct="1">
+      <a:lvl5pPr marL="274251" indent="-30472" algn="l" defTabSz="121890" rtl="0" eaLnBrk="1" latinLnBrk="0" hangingPunct="1">
         <a:lnSpc>
           <a:spcPct val="90000"/>
         </a:lnSpc>
         <a:spcBef>
-          <a:spcPts val="61"/>
+          <a:spcPts val="67"/>
         </a:spcBef>
         <a:buFont typeface="Arial" panose="020B0604020202020204" pitchFamily="34" charset="0"/>
         <a:buChar char="•"/>
-        <a:defRPr sz="218" kern="1200">
+        <a:defRPr sz="240" kern="1200">
           <a:solidFill>
             <a:schemeClr val="tx1"/>
           </a:solidFill>
@@ -3226,16 +3137,16 @@
           <a:cs typeface="+mn-cs"/>
         </a:defRPr>
       </a:lvl5pPr>
-      <a:lvl6pPr marL="304267" indent="-27661" algn="l" defTabSz="110642" rtl="0" eaLnBrk="1" latinLnBrk="0" hangingPunct="1">
+      <a:lvl6pPr marL="335196" indent="-30472" algn="l" defTabSz="121890" rtl="0" eaLnBrk="1" latinLnBrk="0" hangingPunct="1">
         <a:lnSpc>
           <a:spcPct val="90000"/>
         </a:lnSpc>
         <a:spcBef>
-          <a:spcPts val="61"/>
+          <a:spcPts val="67"/>
         </a:spcBef>
         <a:buFont typeface="Arial" panose="020B0604020202020204" pitchFamily="34" charset="0"/>
         <a:buChar char="•"/>
-        <a:defRPr sz="218" kern="1200">
+        <a:defRPr sz="240" kern="1200">
           <a:solidFill>
             <a:schemeClr val="tx1"/>
           </a:solidFill>
@@ -3244,16 +3155,16 @@
           <a:cs typeface="+mn-cs"/>
         </a:defRPr>
       </a:lvl6pPr>
-      <a:lvl7pPr marL="359588" indent="-27661" algn="l" defTabSz="110642" rtl="0" eaLnBrk="1" latinLnBrk="0" hangingPunct="1">
+      <a:lvl7pPr marL="396141" indent="-30472" algn="l" defTabSz="121890" rtl="0" eaLnBrk="1" latinLnBrk="0" hangingPunct="1">
         <a:lnSpc>
           <a:spcPct val="90000"/>
         </a:lnSpc>
         <a:spcBef>
-          <a:spcPts val="61"/>
+          <a:spcPts val="67"/>
         </a:spcBef>
         <a:buFont typeface="Arial" panose="020B0604020202020204" pitchFamily="34" charset="0"/>
         <a:buChar char="•"/>
-        <a:defRPr sz="218" kern="1200">
+        <a:defRPr sz="240" kern="1200">
           <a:solidFill>
             <a:schemeClr val="tx1"/>
           </a:solidFill>
@@ -3262,16 +3173,16 @@
           <a:cs typeface="+mn-cs"/>
         </a:defRPr>
       </a:lvl7pPr>
-      <a:lvl8pPr marL="414909" indent="-27661" algn="l" defTabSz="110642" rtl="0" eaLnBrk="1" latinLnBrk="0" hangingPunct="1">
+      <a:lvl8pPr marL="457086" indent="-30472" algn="l" defTabSz="121890" rtl="0" eaLnBrk="1" latinLnBrk="0" hangingPunct="1">
         <a:lnSpc>
           <a:spcPct val="90000"/>
         </a:lnSpc>
         <a:spcBef>
-          <a:spcPts val="61"/>
+          <a:spcPts val="67"/>
         </a:spcBef>
         <a:buFont typeface="Arial" panose="020B0604020202020204" pitchFamily="34" charset="0"/>
         <a:buChar char="•"/>
-        <a:defRPr sz="218" kern="1200">
+        <a:defRPr sz="240" kern="1200">
           <a:solidFill>
             <a:schemeClr val="tx1"/>
           </a:solidFill>
@@ -3280,16 +3191,16 @@
           <a:cs typeface="+mn-cs"/>
         </a:defRPr>
       </a:lvl8pPr>
-      <a:lvl9pPr marL="470230" indent="-27661" algn="l" defTabSz="110642" rtl="0" eaLnBrk="1" latinLnBrk="0" hangingPunct="1">
+      <a:lvl9pPr marL="518030" indent="-30472" algn="l" defTabSz="121890" rtl="0" eaLnBrk="1" latinLnBrk="0" hangingPunct="1">
         <a:lnSpc>
           <a:spcPct val="90000"/>
         </a:lnSpc>
         <a:spcBef>
-          <a:spcPts val="61"/>
+          <a:spcPts val="67"/>
         </a:spcBef>
         <a:buFont typeface="Arial" panose="020B0604020202020204" pitchFamily="34" charset="0"/>
         <a:buChar char="•"/>
-        <a:defRPr sz="218" kern="1200">
+        <a:defRPr sz="240" kern="1200">
           <a:solidFill>
             <a:schemeClr val="tx1"/>
           </a:solidFill>
@@ -3303,8 +3214,8 @@
       <a:defPPr>
         <a:defRPr lang="en-US"/>
       </a:defPPr>
-      <a:lvl1pPr marL="0" algn="l" defTabSz="110642" rtl="0" eaLnBrk="1" latinLnBrk="0" hangingPunct="1">
-        <a:defRPr sz="218" kern="1200">
+      <a:lvl1pPr marL="0" algn="l" defTabSz="121890" rtl="0" eaLnBrk="1" latinLnBrk="0" hangingPunct="1">
+        <a:defRPr sz="240" kern="1200">
           <a:solidFill>
             <a:schemeClr val="tx1"/>
           </a:solidFill>
@@ -3313,8 +3224,8 @@
           <a:cs typeface="+mn-cs"/>
         </a:defRPr>
       </a:lvl1pPr>
-      <a:lvl2pPr marL="55321" algn="l" defTabSz="110642" rtl="0" eaLnBrk="1" latinLnBrk="0" hangingPunct="1">
-        <a:defRPr sz="218" kern="1200">
+      <a:lvl2pPr marL="60945" algn="l" defTabSz="121890" rtl="0" eaLnBrk="1" latinLnBrk="0" hangingPunct="1">
+        <a:defRPr sz="240" kern="1200">
           <a:solidFill>
             <a:schemeClr val="tx1"/>
           </a:solidFill>
@@ -3323,8 +3234,8 @@
           <a:cs typeface="+mn-cs"/>
         </a:defRPr>
       </a:lvl2pPr>
-      <a:lvl3pPr marL="110642" algn="l" defTabSz="110642" rtl="0" eaLnBrk="1" latinLnBrk="0" hangingPunct="1">
-        <a:defRPr sz="218" kern="1200">
+      <a:lvl3pPr marL="121890" algn="l" defTabSz="121890" rtl="0" eaLnBrk="1" latinLnBrk="0" hangingPunct="1">
+        <a:defRPr sz="240" kern="1200">
           <a:solidFill>
             <a:schemeClr val="tx1"/>
           </a:solidFill>
@@ -3333,8 +3244,8 @@
           <a:cs typeface="+mn-cs"/>
         </a:defRPr>
       </a:lvl3pPr>
-      <a:lvl4pPr marL="165964" algn="l" defTabSz="110642" rtl="0" eaLnBrk="1" latinLnBrk="0" hangingPunct="1">
-        <a:defRPr sz="218" kern="1200">
+      <a:lvl4pPr marL="182834" algn="l" defTabSz="121890" rtl="0" eaLnBrk="1" latinLnBrk="0" hangingPunct="1">
+        <a:defRPr sz="240" kern="1200">
           <a:solidFill>
             <a:schemeClr val="tx1"/>
           </a:solidFill>
@@ -3343,8 +3254,8 @@
           <a:cs typeface="+mn-cs"/>
         </a:defRPr>
       </a:lvl4pPr>
-      <a:lvl5pPr marL="221285" algn="l" defTabSz="110642" rtl="0" eaLnBrk="1" latinLnBrk="0" hangingPunct="1">
-        <a:defRPr sz="218" kern="1200">
+      <a:lvl5pPr marL="243779" algn="l" defTabSz="121890" rtl="0" eaLnBrk="1" latinLnBrk="0" hangingPunct="1">
+        <a:defRPr sz="240" kern="1200">
           <a:solidFill>
             <a:schemeClr val="tx1"/>
           </a:solidFill>
@@ -3353,8 +3264,8 @@
           <a:cs typeface="+mn-cs"/>
         </a:defRPr>
       </a:lvl5pPr>
-      <a:lvl6pPr marL="276606" algn="l" defTabSz="110642" rtl="0" eaLnBrk="1" latinLnBrk="0" hangingPunct="1">
-        <a:defRPr sz="218" kern="1200">
+      <a:lvl6pPr marL="304724" algn="l" defTabSz="121890" rtl="0" eaLnBrk="1" latinLnBrk="0" hangingPunct="1">
+        <a:defRPr sz="240" kern="1200">
           <a:solidFill>
             <a:schemeClr val="tx1"/>
           </a:solidFill>
@@ -3363,8 +3274,8 @@
           <a:cs typeface="+mn-cs"/>
         </a:defRPr>
       </a:lvl6pPr>
-      <a:lvl7pPr marL="331927" algn="l" defTabSz="110642" rtl="0" eaLnBrk="1" latinLnBrk="0" hangingPunct="1">
-        <a:defRPr sz="218" kern="1200">
+      <a:lvl7pPr marL="365669" algn="l" defTabSz="121890" rtl="0" eaLnBrk="1" latinLnBrk="0" hangingPunct="1">
+        <a:defRPr sz="240" kern="1200">
           <a:solidFill>
             <a:schemeClr val="tx1"/>
           </a:solidFill>
@@ -3373,8 +3284,8 @@
           <a:cs typeface="+mn-cs"/>
         </a:defRPr>
       </a:lvl7pPr>
-      <a:lvl8pPr marL="387248" algn="l" defTabSz="110642" rtl="0" eaLnBrk="1" latinLnBrk="0" hangingPunct="1">
-        <a:defRPr sz="218" kern="1200">
+      <a:lvl8pPr marL="426613" algn="l" defTabSz="121890" rtl="0" eaLnBrk="1" latinLnBrk="0" hangingPunct="1">
+        <a:defRPr sz="240" kern="1200">
           <a:solidFill>
             <a:schemeClr val="tx1"/>
           </a:solidFill>
@@ -3383,8 +3294,8 @@
           <a:cs typeface="+mn-cs"/>
         </a:defRPr>
       </a:lvl8pPr>
-      <a:lvl9pPr marL="442570" algn="l" defTabSz="110642" rtl="0" eaLnBrk="1" latinLnBrk="0" hangingPunct="1">
-        <a:defRPr sz="218" kern="1200">
+      <a:lvl9pPr marL="487558" algn="l" defTabSz="121890" rtl="0" eaLnBrk="1" latinLnBrk="0" hangingPunct="1">
+        <a:defRPr sz="240" kern="1200">
           <a:solidFill>
             <a:schemeClr val="tx1"/>
           </a:solidFill>
@@ -3417,10 +3328,40 @@
       </p:grpSpPr>
       <p:pic>
         <p:nvPicPr>
+          <p:cNvPr id="34" name="Picture 33">
+            <a:extLst>
+              <a:ext uri="{FF2B5EF4-FFF2-40B4-BE49-F238E27FC236}">
+                <a16:creationId xmlns:a16="http://schemas.microsoft.com/office/drawing/2014/main" id="{C9F89280-DAEC-F11F-918F-1DE2569C6ABE}"/>
+              </a:ext>
+            </a:extLst>
+          </p:cNvPr>
+          <p:cNvPicPr>
+            <a:picLocks noChangeAspect="1"/>
+          </p:cNvPicPr>
+          <p:nvPr/>
+        </p:nvPicPr>
+        <p:blipFill>
+          <a:blip r:embed="rId2"/>
+          <a:stretch>
+            <a:fillRect/>
+          </a:stretch>
+        </p:blipFill>
+        <p:spPr>
+          <a:xfrm>
+            <a:off x="658330" y="52023"/>
+            <a:ext cx="854364" cy="356605"/>
+          </a:xfrm>
+          <a:prstGeom prst="rect">
+            <a:avLst/>
+          </a:prstGeom>
+        </p:spPr>
+      </p:pic>
+      <p:pic>
+        <p:nvPicPr>
           <p:cNvPr id="35" name="Picture 34">
             <a:extLst>
               <a:ext uri="{FF2B5EF4-FFF2-40B4-BE49-F238E27FC236}">
-                <a16:creationId xmlns:a16="http://schemas.microsoft.com/office/drawing/2014/main" id="{86934039-67C0-4262-49AA-B2CF05085B2A}"/>
+                <a16:creationId xmlns:a16="http://schemas.microsoft.com/office/drawing/2014/main" id="{68492253-086C-3238-3D66-AF4DEFCB7EF5}"/>
               </a:ext>
             </a:extLst>
           </p:cNvPr>
@@ -3437,8 +3378,8 @@
         </p:blipFill>
         <p:spPr>
           <a:xfrm>
-            <a:off x="31643" y="19291"/>
-            <a:ext cx="707050" cy="441907"/>
+            <a:off x="0" y="504707"/>
+            <a:ext cx="823075" cy="398619"/>
           </a:xfrm>
           <a:prstGeom prst="rect">
             <a:avLst/>
@@ -3450,7 +3391,7 @@
           <p:cNvPr id="36" name="Picture 35">
             <a:extLst>
               <a:ext uri="{FF2B5EF4-FFF2-40B4-BE49-F238E27FC236}">
-                <a16:creationId xmlns:a16="http://schemas.microsoft.com/office/drawing/2014/main" id="{CF703F24-8D10-2EC5-839F-D106B4D88F49}"/>
+                <a16:creationId xmlns:a16="http://schemas.microsoft.com/office/drawing/2014/main" id="{32A9387B-B432-E596-D22F-D17384345E44}"/>
               </a:ext>
             </a:extLst>
           </p:cNvPr>
@@ -3467,20 +3408,160 @@
         </p:blipFill>
         <p:spPr>
           <a:xfrm>
-            <a:off x="802215" y="61748"/>
-            <a:ext cx="657100" cy="375486"/>
+            <a:off x="819880" y="518428"/>
+            <a:ext cx="958691" cy="383477"/>
           </a:xfrm>
           <a:prstGeom prst="rect">
             <a:avLst/>
           </a:prstGeom>
         </p:spPr>
       </p:pic>
+      <p:sp>
+        <p:nvSpPr>
+          <p:cNvPr id="37" name="TextBox 36">
+            <a:extLst>
+              <a:ext uri="{FF2B5EF4-FFF2-40B4-BE49-F238E27FC236}">
+                <a16:creationId xmlns:a16="http://schemas.microsoft.com/office/drawing/2014/main" id="{2B053255-8043-2092-3FC6-6E014968174D}"/>
+              </a:ext>
+            </a:extLst>
+          </p:cNvPr>
+          <p:cNvSpPr txBox="1"/>
+          <p:nvPr/>
+        </p:nvSpPr>
+        <p:spPr>
+          <a:xfrm>
+            <a:off x="174625" y="-31677"/>
+            <a:ext cx="228600" cy="153888"/>
+          </a:xfrm>
+          <a:prstGeom prst="rect">
+            <a:avLst/>
+          </a:prstGeom>
+          <a:noFill/>
+        </p:spPr>
+        <p:txBody>
+          <a:bodyPr wrap="square" rtlCol="0">
+            <a:spAutoFit/>
+          </a:bodyPr>
+          <a:lstStyle/>
+          <a:p>
+            <a:r>
+              <a:rPr lang="en-DE" sz="400" b="1" dirty="0"/>
+              <a:t>A</a:t>
+            </a:r>
+          </a:p>
+        </p:txBody>
+      </p:sp>
+      <p:sp>
+        <p:nvSpPr>
+          <p:cNvPr id="38" name="TextBox 37">
+            <a:extLst>
+              <a:ext uri="{FF2B5EF4-FFF2-40B4-BE49-F238E27FC236}">
+                <a16:creationId xmlns:a16="http://schemas.microsoft.com/office/drawing/2014/main" id="{D08B8F0F-8754-963E-E634-9C9C9750B6AE}"/>
+              </a:ext>
+            </a:extLst>
+          </p:cNvPr>
+          <p:cNvSpPr txBox="1"/>
+          <p:nvPr/>
+        </p:nvSpPr>
+        <p:spPr>
+          <a:xfrm>
+            <a:off x="-82098" y="441279"/>
+            <a:ext cx="228600" cy="153888"/>
+          </a:xfrm>
+          <a:prstGeom prst="rect">
+            <a:avLst/>
+          </a:prstGeom>
+          <a:noFill/>
+        </p:spPr>
+        <p:txBody>
+          <a:bodyPr wrap="square" rtlCol="0">
+            <a:spAutoFit/>
+          </a:bodyPr>
+          <a:lstStyle/>
+          <a:p>
+            <a:r>
+              <a:rPr lang="en-DE" sz="400" b="1" dirty="0"/>
+              <a:t>C</a:t>
+            </a:r>
+          </a:p>
+        </p:txBody>
+      </p:sp>
+      <p:sp>
+        <p:nvSpPr>
+          <p:cNvPr id="39" name="TextBox 38">
+            <a:extLst>
+              <a:ext uri="{FF2B5EF4-FFF2-40B4-BE49-F238E27FC236}">
+                <a16:creationId xmlns:a16="http://schemas.microsoft.com/office/drawing/2014/main" id="{36442A5E-B066-2EB4-814D-B0143ACDAE25}"/>
+              </a:ext>
+            </a:extLst>
+          </p:cNvPr>
+          <p:cNvSpPr txBox="1"/>
+          <p:nvPr/>
+        </p:nvSpPr>
+        <p:spPr>
+          <a:xfrm>
+            <a:off x="598559" y="-36555"/>
+            <a:ext cx="228600" cy="153888"/>
+          </a:xfrm>
+          <a:prstGeom prst="rect">
+            <a:avLst/>
+          </a:prstGeom>
+          <a:noFill/>
+        </p:spPr>
+        <p:txBody>
+          <a:bodyPr wrap="square" rtlCol="0">
+            <a:spAutoFit/>
+          </a:bodyPr>
+          <a:lstStyle/>
+          <a:p>
+            <a:r>
+              <a:rPr lang="en-DE" sz="400" b="1" dirty="0"/>
+              <a:t>B</a:t>
+            </a:r>
+          </a:p>
+        </p:txBody>
+      </p:sp>
+      <p:sp>
+        <p:nvSpPr>
+          <p:cNvPr id="40" name="TextBox 39">
+            <a:extLst>
+              <a:ext uri="{FF2B5EF4-FFF2-40B4-BE49-F238E27FC236}">
+                <a16:creationId xmlns:a16="http://schemas.microsoft.com/office/drawing/2014/main" id="{F5453CE4-80AF-7835-84C4-B3DBD06BFCDC}"/>
+              </a:ext>
+            </a:extLst>
+          </p:cNvPr>
+          <p:cNvSpPr txBox="1"/>
+          <p:nvPr/>
+        </p:nvSpPr>
+        <p:spPr>
+          <a:xfrm>
+            <a:off x="727805" y="448189"/>
+            <a:ext cx="228600" cy="153888"/>
+          </a:xfrm>
+          <a:prstGeom prst="rect">
+            <a:avLst/>
+          </a:prstGeom>
+          <a:noFill/>
+        </p:spPr>
+        <p:txBody>
+          <a:bodyPr wrap="square" rtlCol="0">
+            <a:spAutoFit/>
+          </a:bodyPr>
+          <a:lstStyle/>
+          <a:p>
+            <a:r>
+              <a:rPr lang="en-DE" sz="400" b="1" dirty="0"/>
+              <a:t>D</a:t>
+            </a:r>
+          </a:p>
+        </p:txBody>
+      </p:sp>
       <p:pic>
         <p:nvPicPr>
-          <p:cNvPr id="37" name="Picture 36">
+          <p:cNvPr id="41" name="Picture 40">
             <a:extLst>
               <a:ext uri="{FF2B5EF4-FFF2-40B4-BE49-F238E27FC236}">
-                <a16:creationId xmlns:a16="http://schemas.microsoft.com/office/drawing/2014/main" id="{AD598221-6FA9-DCDD-46ED-51B9655FD0CD}"/>
+                <a16:creationId xmlns:a16="http://schemas.microsoft.com/office/drawing/2014/main" id="{10695281-03CF-60F1-0C5D-FE445121E36D}"/>
               </a:ext>
             </a:extLst>
           </p:cNvPr>
@@ -3497,184 +3578,14 @@
         </p:blipFill>
         <p:spPr>
           <a:xfrm>
-            <a:off x="15191" y="472578"/>
-            <a:ext cx="741662" cy="444997"/>
+            <a:off x="320559" y="-1951"/>
+            <a:ext cx="337771" cy="506657"/>
           </a:xfrm>
           <a:prstGeom prst="rect">
             <a:avLst/>
           </a:prstGeom>
         </p:spPr>
       </p:pic>
-      <p:sp>
-        <p:nvSpPr>
-          <p:cNvPr id="39" name="TextBox 38">
-            <a:extLst>
-              <a:ext uri="{FF2B5EF4-FFF2-40B4-BE49-F238E27FC236}">
-                <a16:creationId xmlns:a16="http://schemas.microsoft.com/office/drawing/2014/main" id="{95B5EE48-03AD-231F-48B3-E094B0C3B020}"/>
-              </a:ext>
-            </a:extLst>
-          </p:cNvPr>
-          <p:cNvSpPr txBox="1"/>
-          <p:nvPr/>
-        </p:nvSpPr>
-        <p:spPr>
-          <a:xfrm>
-            <a:off x="-61559" y="-37179"/>
-            <a:ext cx="235750" cy="169277"/>
-          </a:xfrm>
-          <a:prstGeom prst="rect">
-            <a:avLst/>
-          </a:prstGeom>
-          <a:noFill/>
-        </p:spPr>
-        <p:txBody>
-          <a:bodyPr wrap="square" rtlCol="0">
-            <a:spAutoFit/>
-          </a:bodyPr>
-          <a:lstStyle/>
-          <a:p>
-            <a:r>
-              <a:rPr lang="en-DE" sz="500" b="1" dirty="0"/>
-              <a:t>A</a:t>
-            </a:r>
-          </a:p>
-        </p:txBody>
-      </p:sp>
-      <p:sp>
-        <p:nvSpPr>
-          <p:cNvPr id="40" name="TextBox 39">
-            <a:extLst>
-              <a:ext uri="{FF2B5EF4-FFF2-40B4-BE49-F238E27FC236}">
-                <a16:creationId xmlns:a16="http://schemas.microsoft.com/office/drawing/2014/main" id="{1C990AAA-07DF-370E-82C2-B0A28810BE15}"/>
-              </a:ext>
-            </a:extLst>
-          </p:cNvPr>
-          <p:cNvSpPr txBox="1"/>
-          <p:nvPr/>
-        </p:nvSpPr>
-        <p:spPr>
-          <a:xfrm>
-            <a:off x="684340" y="-28580"/>
-            <a:ext cx="235750" cy="169277"/>
-          </a:xfrm>
-          <a:prstGeom prst="rect">
-            <a:avLst/>
-          </a:prstGeom>
-          <a:noFill/>
-        </p:spPr>
-        <p:txBody>
-          <a:bodyPr wrap="square" rtlCol="0">
-            <a:spAutoFit/>
-          </a:bodyPr>
-          <a:lstStyle/>
-          <a:p>
-            <a:r>
-              <a:rPr lang="en-DE" sz="500" b="1" dirty="0"/>
-              <a:t>B</a:t>
-            </a:r>
-          </a:p>
-        </p:txBody>
-      </p:sp>
-      <p:sp>
-        <p:nvSpPr>
-          <p:cNvPr id="41" name="TextBox 40">
-            <a:extLst>
-              <a:ext uri="{FF2B5EF4-FFF2-40B4-BE49-F238E27FC236}">
-                <a16:creationId xmlns:a16="http://schemas.microsoft.com/office/drawing/2014/main" id="{17E5B50E-43FF-5CD0-7453-90AD1C45CC86}"/>
-              </a:ext>
-            </a:extLst>
-          </p:cNvPr>
-          <p:cNvSpPr txBox="1"/>
-          <p:nvPr/>
-        </p:nvSpPr>
-        <p:spPr>
-          <a:xfrm>
-            <a:off x="-86236" y="406554"/>
-            <a:ext cx="235750" cy="169277"/>
-          </a:xfrm>
-          <a:prstGeom prst="rect">
-            <a:avLst/>
-          </a:prstGeom>
-          <a:noFill/>
-        </p:spPr>
-        <p:txBody>
-          <a:bodyPr wrap="square" rtlCol="0">
-            <a:spAutoFit/>
-          </a:bodyPr>
-          <a:lstStyle/>
-          <a:p>
-            <a:r>
-              <a:rPr lang="en-DE" sz="500" b="1" dirty="0"/>
-              <a:t>C</a:t>
-            </a:r>
-          </a:p>
-        </p:txBody>
-      </p:sp>
-      <p:pic>
-        <p:nvPicPr>
-          <p:cNvPr id="3" name="Picture 2">
-            <a:extLst>
-              <a:ext uri="{FF2B5EF4-FFF2-40B4-BE49-F238E27FC236}">
-                <a16:creationId xmlns:a16="http://schemas.microsoft.com/office/drawing/2014/main" id="{5135A271-CE3D-7C24-642F-B0F7111DFDAA}"/>
-              </a:ext>
-            </a:extLst>
-          </p:cNvPr>
-          <p:cNvPicPr>
-            <a:picLocks noChangeAspect="1"/>
-          </p:cNvPicPr>
-          <p:nvPr/>
-        </p:nvPicPr>
-        <p:blipFill>
-          <a:blip r:embed="rId6"/>
-          <a:stretch>
-            <a:fillRect/>
-          </a:stretch>
-        </p:blipFill>
-        <p:spPr>
-          <a:xfrm>
-            <a:off x="740533" y="487483"/>
-            <a:ext cx="734657" cy="326514"/>
-          </a:xfrm>
-          <a:prstGeom prst="rect">
-            <a:avLst/>
-          </a:prstGeom>
-        </p:spPr>
-      </p:pic>
-      <p:sp>
-        <p:nvSpPr>
-          <p:cNvPr id="42" name="TextBox 41">
-            <a:extLst>
-              <a:ext uri="{FF2B5EF4-FFF2-40B4-BE49-F238E27FC236}">
-                <a16:creationId xmlns:a16="http://schemas.microsoft.com/office/drawing/2014/main" id="{60D85E2A-5AF1-42B3-DB7B-56B966CB1210}"/>
-              </a:ext>
-            </a:extLst>
-          </p:cNvPr>
-          <p:cNvSpPr txBox="1"/>
-          <p:nvPr/>
-        </p:nvSpPr>
-        <p:spPr>
-          <a:xfrm>
-            <a:off x="651797" y="402404"/>
-            <a:ext cx="235750" cy="169277"/>
-          </a:xfrm>
-          <a:prstGeom prst="rect">
-            <a:avLst/>
-          </a:prstGeom>
-          <a:noFill/>
-        </p:spPr>
-        <p:txBody>
-          <a:bodyPr wrap="square" rtlCol="0">
-            <a:spAutoFit/>
-          </a:bodyPr>
-          <a:lstStyle/>
-          <a:p>
-            <a:r>
-              <a:rPr lang="en-DE" sz="500" b="1" dirty="0"/>
-              <a:t>D</a:t>
-            </a:r>
-          </a:p>
-        </p:txBody>
-      </p:sp>
     </p:spTree>
     <p:extLst>
       <p:ext uri="{BB962C8B-B14F-4D97-AF65-F5344CB8AC3E}">
